--- a/!_Graduate_Work/FinalProject/Presa.pptx
+++ b/!_Graduate_Work/FinalProject/Presa.pptx
@@ -112,6 +112,11 @@
       </a:defRPr>
     </a:lvl9pPr>
   </p:defaultTextStyle>
+  <p:extLst>
+    <p:ext uri="{EFAFB233-063F-42B5-8137-9DF3F51BA10A}">
+      <p15:sldGuideLst xmlns:p15="http://schemas.microsoft.com/office/powerpoint/2012/main"/>
+    </p:ext>
+  </p:extLst>
 </p:presentation>
 </file>
 
@@ -262,7 +267,7 @@
           <a:p>
             <a:fld id="{A62313DB-A418-4B96-B091-0F5A28B5E363}" type="datetimeFigureOut">
               <a:rPr lang="ru-RU" smtClean="0"/>
-              <a:t>01.10.2023</a:t>
+              <a:t>15.11.2024</a:t>
             </a:fld>
             <a:endParaRPr lang="ru-RU"/>
           </a:p>
@@ -460,7 +465,7 @@
           <a:p>
             <a:fld id="{A62313DB-A418-4B96-B091-0F5A28B5E363}" type="datetimeFigureOut">
               <a:rPr lang="ru-RU" smtClean="0"/>
-              <a:t>01.10.2023</a:t>
+              <a:t>15.11.2024</a:t>
             </a:fld>
             <a:endParaRPr lang="ru-RU"/>
           </a:p>
@@ -668,7 +673,7 @@
           <a:p>
             <a:fld id="{A62313DB-A418-4B96-B091-0F5A28B5E363}" type="datetimeFigureOut">
               <a:rPr lang="ru-RU" smtClean="0"/>
-              <a:t>01.10.2023</a:t>
+              <a:t>15.11.2024</a:t>
             </a:fld>
             <a:endParaRPr lang="ru-RU"/>
           </a:p>
@@ -866,7 +871,7 @@
           <a:p>
             <a:fld id="{A62313DB-A418-4B96-B091-0F5A28B5E363}" type="datetimeFigureOut">
               <a:rPr lang="ru-RU" smtClean="0"/>
-              <a:t>01.10.2023</a:t>
+              <a:t>15.11.2024</a:t>
             </a:fld>
             <a:endParaRPr lang="ru-RU"/>
           </a:p>
@@ -1141,7 +1146,7 @@
           <a:p>
             <a:fld id="{A62313DB-A418-4B96-B091-0F5A28B5E363}" type="datetimeFigureOut">
               <a:rPr lang="ru-RU" smtClean="0"/>
-              <a:t>01.10.2023</a:t>
+              <a:t>15.11.2024</a:t>
             </a:fld>
             <a:endParaRPr lang="ru-RU"/>
           </a:p>
@@ -1406,7 +1411,7 @@
           <a:p>
             <a:fld id="{A62313DB-A418-4B96-B091-0F5A28B5E363}" type="datetimeFigureOut">
               <a:rPr lang="ru-RU" smtClean="0"/>
-              <a:t>01.10.2023</a:t>
+              <a:t>15.11.2024</a:t>
             </a:fld>
             <a:endParaRPr lang="ru-RU"/>
           </a:p>
@@ -1818,7 +1823,7 @@
           <a:p>
             <a:fld id="{A62313DB-A418-4B96-B091-0F5A28B5E363}" type="datetimeFigureOut">
               <a:rPr lang="ru-RU" smtClean="0"/>
-              <a:t>01.10.2023</a:t>
+              <a:t>15.11.2024</a:t>
             </a:fld>
             <a:endParaRPr lang="ru-RU"/>
           </a:p>
@@ -1959,7 +1964,7 @@
           <a:p>
             <a:fld id="{A62313DB-A418-4B96-B091-0F5A28B5E363}" type="datetimeFigureOut">
               <a:rPr lang="ru-RU" smtClean="0"/>
-              <a:t>01.10.2023</a:t>
+              <a:t>15.11.2024</a:t>
             </a:fld>
             <a:endParaRPr lang="ru-RU"/>
           </a:p>
@@ -2072,7 +2077,7 @@
           <a:p>
             <a:fld id="{A62313DB-A418-4B96-B091-0F5A28B5E363}" type="datetimeFigureOut">
               <a:rPr lang="ru-RU" smtClean="0"/>
-              <a:t>01.10.2023</a:t>
+              <a:t>15.11.2024</a:t>
             </a:fld>
             <a:endParaRPr lang="ru-RU"/>
           </a:p>
@@ -2383,7 +2388,7 @@
           <a:p>
             <a:fld id="{A62313DB-A418-4B96-B091-0F5A28B5E363}" type="datetimeFigureOut">
               <a:rPr lang="ru-RU" smtClean="0"/>
-              <a:t>01.10.2023</a:t>
+              <a:t>15.11.2024</a:t>
             </a:fld>
             <a:endParaRPr lang="ru-RU"/>
           </a:p>
@@ -2671,7 +2676,7 @@
           <a:p>
             <a:fld id="{A62313DB-A418-4B96-B091-0F5A28B5E363}" type="datetimeFigureOut">
               <a:rPr lang="ru-RU" smtClean="0"/>
-              <a:t>01.10.2023</a:t>
+              <a:t>15.11.2024</a:t>
             </a:fld>
             <a:endParaRPr lang="ru-RU"/>
           </a:p>
@@ -2921,7 +2926,7 @@
           <a:p>
             <a:fld id="{A62313DB-A418-4B96-B091-0F5A28B5E363}" type="datetimeFigureOut">
               <a:rPr lang="ru-RU" smtClean="0"/>
-              <a:t>01.10.2023</a:t>
+              <a:t>15.11.2024</a:t>
             </a:fld>
             <a:endParaRPr lang="ru-RU"/>
           </a:p>
@@ -3411,7 +3416,7 @@
         <p:spPr>
           <a:xfrm>
             <a:off x="2189747" y="2479829"/>
-            <a:ext cx="7812505" cy="1384995"/>
+            <a:ext cx="7812505" cy="1815882"/>
           </a:xfrm>
           <a:prstGeom prst="rect">
             <a:avLst/>
@@ -3445,6 +3450,9 @@
             <a:endParaRPr lang="en-US" sz="2800" b="0" dirty="0">
               <a:effectLst/>
             </a:endParaRPr>
+          </a:p>
+          <a:p>
+            <a:endParaRPr lang="en-US" sz="2800"/>
           </a:p>
           <a:p>
             <a:br>
